--- a/public/fun/pack/pptx/weddingpro/결혼식프리미엄_42_러브스토리중심_제이드실버.pptx
+++ b/public/fun/pack/pptx/weddingpro/결혼식프리미엄_42_러브스토리중심_제이드실버.pptx
@@ -113,12 +113,12 @@
   <p:extLst>
     <p:ext uri="{521415D9-36F7-43E2-AB2F-B90AF26B5E84}">
       <p14:sectionLst xmlns:p14="http://schemas.microsoft.com/office/powerpoint/2010/main">
-        <p14:section name="시작" id="{B74B371D-F313-44B4-9CEE-CACF4DC93C68}">
+        <p14:section name="시작" id="{2E405187-12F4-4801-84AE-D3DAB806900A}">
           <p14:sldIdLst>
             <p14:sldId id="256"/>
           </p14:sldIdLst>
         </p14:section>
-        <p14:section name="본문" id="{CEABB9E1-2A78-4D0E-AA7A-09EDA74C4659}">
+        <p14:section name="본문" id="{64193DDA-ED71-4992-8206-38BF366C83BD}">
           <p14:sldIdLst>
             <p14:sldId id="257"/>
             <p14:sldId id="258"/>
@@ -127,7 +127,7 @@
             <p14:sldId id="261"/>
           </p14:sldIdLst>
         </p14:section>
-        <p14:section name="마무리" id="{76785780-25AE-4649-BE7B-532FB3C44919}">
+        <p14:section name="마무리" id="{DD51C07F-7DA5-425B-9C4E-555D972A0D5D}">
           <p14:sldIdLst>
             <p14:sldId id="262"/>
           </p14:sldIdLst>
@@ -1959,7 +1959,7 @@
             </a:lvl1pPr>
           </a:lstStyle>
           <a:p>
-            <a:fld id="{00A2B907-3BBA-4414-93DD-17939A188742}" type="slidenum">
+            <a:fld id="{6777117E-7681-460E-B439-134C43B88795}" type="slidenum">
               <a:rPr lang="en-US"/>
               <a:t>‹#›</a:t>
             </a:fld>
@@ -3386,7 +3386,7 @@
             </a:lvl1pPr>
           </a:lstStyle>
           <a:p>
-            <a:fld id="{7911A8FF-4329-45AC-A671-71DDEF7472BA}" type="slidenum">
+            <a:fld id="{F53D4889-DCCA-4A70-B9EA-BF7CAB5A72D7}" type="slidenum">
               <a:rPr lang="en-US"/>
               <a:t>‹#›</a:t>
             </a:fld>
@@ -4393,7 +4393,7 @@
             </a:lvl1pPr>
           </a:lstStyle>
           <a:p>
-            <a:fld id="{8538B040-EA51-4F45-9FFD-C1D29575A086}" type="slidenum">
+            <a:fld id="{9F950D1B-A92F-4DE5-80DA-9ACAD6D230BD}" type="slidenum">
               <a:rPr lang="en-US"/>
               <a:t>‹#›</a:t>
             </a:fld>
@@ -5534,7 +5534,7 @@
           <a:p>
             <a:r>
               <a:rPr lang="ko-KR"/>
-              <a:t>눈 오는 날 같이 걸으며 정했습니다</a:t>
+              <a:t>같이 걸으며 마음을 정했습니다</a:t>
             </a:r>
           </a:p>
         </p:txBody>
@@ -5562,7 +5562,7 @@
           <a:p>
             <a:r>
               <a:rPr lang="ko-KR"/>
-              <a:t>0000. 00. 00 · 예식장 이름</a:t>
+              <a:t>날짜 입력 · 예식장 이름</a:t>
             </a:r>
           </a:p>
         </p:txBody>
@@ -5783,7 +5783,7 @@
           <a:bodyPr/>
           <a:lstStyle/>
           <a:p>
-            <a:fld id="{0DEC325C-47A2-41A3-9ECF-63DC62A13B60}" type="slidenum">
+            <a:fld id="{5280E09E-513A-48B3-951F-056C3EFDF45F}" type="slidenum">
               <a:rPr lang="en-US"/>
               <a:t>‹#›</a:t>
             </a:fld>
@@ -6185,7 +6185,7 @@
           <a:bodyPr/>
           <a:lstStyle/>
           <a:p>
-            <a:fld id="{173810F4-97FC-4B5C-BDE2-3E012CCA2BD7}" type="slidenum">
+            <a:fld id="{08AC7DDB-C3BE-4B28-BBDB-3A7263E86D37}" type="slidenum">
               <a:rPr lang="en-US"/>
               <a:t>‹#›</a:t>
             </a:fld>
@@ -7160,7 +7160,7 @@
           <a:bodyPr/>
           <a:lstStyle/>
           <a:p>
-            <a:fld id="{FC335DCF-3B64-4DCF-9E88-EC293C4B5140}" type="slidenum">
+            <a:fld id="{F031523F-02E9-4B15-9CEF-ABA7DCD9ED31}" type="slidenum">
               <a:rPr lang="en-US"/>
               <a:t>‹#›</a:t>
             </a:fld>
@@ -8692,7 +8692,7 @@
           <a:bodyPr/>
           <a:lstStyle/>
           <a:p>
-            <a:fld id="{518CE525-3287-4E06-8AD4-978255681FAB}" type="slidenum">
+            <a:fld id="{6B3A44BB-2C9A-48F1-A615-55701C502D8F}" type="slidenum">
               <a:rPr lang="en-US"/>
               <a:t>‹#›</a:t>
             </a:fld>
@@ -8780,7 +8780,7 @@
           <a:bodyPr/>
           <a:lstStyle/>
           <a:p>
-            <a:fld id="{20C48BA1-4814-4342-BF75-9587983F6400}" type="slidenum">
+            <a:fld id="{854A024F-A666-4FFD-813C-F5375B31F401}" type="slidenum">
               <a:rPr lang="en-US"/>
               <a:t>‹#›</a:t>
             </a:fld>
